--- a/vignettes/netmeta-workflow-diagram.pptx
+++ b/vignettes/netmeta-workflow-diagram.pptx
@@ -218,7 +218,7 @@
           <a:p>
             <a:fld id="{69CB9DE3-BDD7-804F-B6D8-0494A12EB68B}" type="datetimeFigureOut">
               <a:rPr lang="de-DE" smtClean="0"/>
-              <a:t>31.07.25</a:t>
+              <a:t>04.05.26</a:t>
             </a:fld>
             <a:endParaRPr lang="de-DE"/>
           </a:p>
@@ -376,7 +376,7 @@
           <a:p>
             <a:fld id="{6F595F98-21AA-684C-ACF8-61924B9090EA}" type="slidenum">
               <a:rPr lang="de-DE" smtClean="0"/>
-              <a:t>‹Nr.›</a:t>
+              <a:t>‹#›</a:t>
             </a:fld>
             <a:endParaRPr lang="de-DE"/>
           </a:p>
@@ -750,7 +750,7 @@
           <a:p>
             <a:fld id="{618329BC-0193-4A0A-A11A-F6C2761391EB}" type="datetimeFigureOut">
               <a:rPr lang="en-GB" smtClean="0"/>
-              <a:t>31/07/2025</a:t>
+              <a:t>04/05/2026</a:t>
             </a:fld>
             <a:endParaRPr lang="en-GB"/>
           </a:p>
@@ -792,7 +792,7 @@
           <a:p>
             <a:fld id="{8B14C7FE-A8AE-41B9-8C34-CC5849DD2839}" type="slidenum">
               <a:rPr lang="en-GB" smtClean="0"/>
-              <a:t>‹Nr.›</a:t>
+              <a:t>‹#›</a:t>
             </a:fld>
             <a:endParaRPr lang="en-GB"/>
           </a:p>
@@ -920,7 +920,7 @@
           <a:p>
             <a:fld id="{618329BC-0193-4A0A-A11A-F6C2761391EB}" type="datetimeFigureOut">
               <a:rPr lang="en-GB" smtClean="0"/>
-              <a:t>31/07/2025</a:t>
+              <a:t>04/05/2026</a:t>
             </a:fld>
             <a:endParaRPr lang="en-GB"/>
           </a:p>
@@ -962,7 +962,7 @@
           <a:p>
             <a:fld id="{8B14C7FE-A8AE-41B9-8C34-CC5849DD2839}" type="slidenum">
               <a:rPr lang="en-GB" smtClean="0"/>
-              <a:t>‹Nr.›</a:t>
+              <a:t>‹#›</a:t>
             </a:fld>
             <a:endParaRPr lang="en-GB"/>
           </a:p>
@@ -1100,7 +1100,7 @@
           <a:p>
             <a:fld id="{618329BC-0193-4A0A-A11A-F6C2761391EB}" type="datetimeFigureOut">
               <a:rPr lang="en-GB" smtClean="0"/>
-              <a:t>31/07/2025</a:t>
+              <a:t>04/05/2026</a:t>
             </a:fld>
             <a:endParaRPr lang="en-GB"/>
           </a:p>
@@ -1142,7 +1142,7 @@
           <a:p>
             <a:fld id="{8B14C7FE-A8AE-41B9-8C34-CC5849DD2839}" type="slidenum">
               <a:rPr lang="en-GB" smtClean="0"/>
-              <a:t>‹Nr.›</a:t>
+              <a:t>‹#›</a:t>
             </a:fld>
             <a:endParaRPr lang="en-GB"/>
           </a:p>
@@ -1270,7 +1270,7 @@
           <a:p>
             <a:fld id="{618329BC-0193-4A0A-A11A-F6C2761391EB}" type="datetimeFigureOut">
               <a:rPr lang="en-GB" smtClean="0"/>
-              <a:t>31/07/2025</a:t>
+              <a:t>04/05/2026</a:t>
             </a:fld>
             <a:endParaRPr lang="en-GB"/>
           </a:p>
@@ -1312,7 +1312,7 @@
           <a:p>
             <a:fld id="{8B14C7FE-A8AE-41B9-8C34-CC5849DD2839}" type="slidenum">
               <a:rPr lang="en-GB" smtClean="0"/>
-              <a:t>‹Nr.›</a:t>
+              <a:t>‹#›</a:t>
             </a:fld>
             <a:endParaRPr lang="en-GB"/>
           </a:p>
@@ -1516,7 +1516,7 @@
           <a:p>
             <a:fld id="{618329BC-0193-4A0A-A11A-F6C2761391EB}" type="datetimeFigureOut">
               <a:rPr lang="en-GB" smtClean="0"/>
-              <a:t>31/07/2025</a:t>
+              <a:t>04/05/2026</a:t>
             </a:fld>
             <a:endParaRPr lang="en-GB"/>
           </a:p>
@@ -1558,7 +1558,7 @@
           <a:p>
             <a:fld id="{8B14C7FE-A8AE-41B9-8C34-CC5849DD2839}" type="slidenum">
               <a:rPr lang="en-GB" smtClean="0"/>
-              <a:t>‹Nr.›</a:t>
+              <a:t>‹#›</a:t>
             </a:fld>
             <a:endParaRPr lang="en-GB"/>
           </a:p>
@@ -1804,7 +1804,7 @@
           <a:p>
             <a:fld id="{618329BC-0193-4A0A-A11A-F6C2761391EB}" type="datetimeFigureOut">
               <a:rPr lang="en-GB" smtClean="0"/>
-              <a:t>31/07/2025</a:t>
+              <a:t>04/05/2026</a:t>
             </a:fld>
             <a:endParaRPr lang="en-GB"/>
           </a:p>
@@ -1846,7 +1846,7 @@
           <a:p>
             <a:fld id="{8B14C7FE-A8AE-41B9-8C34-CC5849DD2839}" type="slidenum">
               <a:rPr lang="en-GB" smtClean="0"/>
-              <a:t>‹Nr.›</a:t>
+              <a:t>‹#›</a:t>
             </a:fld>
             <a:endParaRPr lang="en-GB"/>
           </a:p>
@@ -2226,7 +2226,7 @@
           <a:p>
             <a:fld id="{618329BC-0193-4A0A-A11A-F6C2761391EB}" type="datetimeFigureOut">
               <a:rPr lang="en-GB" smtClean="0"/>
-              <a:t>31/07/2025</a:t>
+              <a:t>04/05/2026</a:t>
             </a:fld>
             <a:endParaRPr lang="en-GB"/>
           </a:p>
@@ -2268,7 +2268,7 @@
           <a:p>
             <a:fld id="{8B14C7FE-A8AE-41B9-8C34-CC5849DD2839}" type="slidenum">
               <a:rPr lang="en-GB" smtClean="0"/>
-              <a:t>‹Nr.›</a:t>
+              <a:t>‹#›</a:t>
             </a:fld>
             <a:endParaRPr lang="en-GB"/>
           </a:p>
@@ -2344,7 +2344,7 @@
           <a:p>
             <a:fld id="{618329BC-0193-4A0A-A11A-F6C2761391EB}" type="datetimeFigureOut">
               <a:rPr lang="en-GB" smtClean="0"/>
-              <a:t>31/07/2025</a:t>
+              <a:t>04/05/2026</a:t>
             </a:fld>
             <a:endParaRPr lang="en-GB"/>
           </a:p>
@@ -2386,7 +2386,7 @@
           <a:p>
             <a:fld id="{8B14C7FE-A8AE-41B9-8C34-CC5849DD2839}" type="slidenum">
               <a:rPr lang="en-GB" smtClean="0"/>
-              <a:t>‹Nr.›</a:t>
+              <a:t>‹#›</a:t>
             </a:fld>
             <a:endParaRPr lang="en-GB"/>
           </a:p>
@@ -2439,7 +2439,7 @@
           <a:p>
             <a:fld id="{618329BC-0193-4A0A-A11A-F6C2761391EB}" type="datetimeFigureOut">
               <a:rPr lang="en-GB" smtClean="0"/>
-              <a:t>31/07/2025</a:t>
+              <a:t>04/05/2026</a:t>
             </a:fld>
             <a:endParaRPr lang="en-GB"/>
           </a:p>
@@ -2481,7 +2481,7 @@
           <a:p>
             <a:fld id="{8B14C7FE-A8AE-41B9-8C34-CC5849DD2839}" type="slidenum">
               <a:rPr lang="en-GB" smtClean="0"/>
-              <a:t>‹Nr.›</a:t>
+              <a:t>‹#›</a:t>
             </a:fld>
             <a:endParaRPr lang="en-GB"/>
           </a:p>
@@ -2716,7 +2716,7 @@
           <a:p>
             <a:fld id="{618329BC-0193-4A0A-A11A-F6C2761391EB}" type="datetimeFigureOut">
               <a:rPr lang="en-GB" smtClean="0"/>
-              <a:t>31/07/2025</a:t>
+              <a:t>04/05/2026</a:t>
             </a:fld>
             <a:endParaRPr lang="en-GB"/>
           </a:p>
@@ -2758,7 +2758,7 @@
           <a:p>
             <a:fld id="{8B14C7FE-A8AE-41B9-8C34-CC5849DD2839}" type="slidenum">
               <a:rPr lang="en-GB" smtClean="0"/>
-              <a:t>‹Nr.›</a:t>
+              <a:t>‹#›</a:t>
             </a:fld>
             <a:endParaRPr lang="en-GB"/>
           </a:p>
@@ -2969,7 +2969,7 @@
           <a:p>
             <a:fld id="{618329BC-0193-4A0A-A11A-F6C2761391EB}" type="datetimeFigureOut">
               <a:rPr lang="en-GB" smtClean="0"/>
-              <a:t>31/07/2025</a:t>
+              <a:t>04/05/2026</a:t>
             </a:fld>
             <a:endParaRPr lang="en-GB"/>
           </a:p>
@@ -3011,7 +3011,7 @@
           <a:p>
             <a:fld id="{8B14C7FE-A8AE-41B9-8C34-CC5849DD2839}" type="slidenum">
               <a:rPr lang="en-GB" smtClean="0"/>
-              <a:t>‹Nr.›</a:t>
+              <a:t>‹#›</a:t>
             </a:fld>
             <a:endParaRPr lang="en-GB"/>
           </a:p>
@@ -3182,7 +3182,7 @@
           <a:p>
             <a:fld id="{618329BC-0193-4A0A-A11A-F6C2761391EB}" type="datetimeFigureOut">
               <a:rPr lang="en-GB" smtClean="0"/>
-              <a:t>31/07/2025</a:t>
+              <a:t>04/05/2026</a:t>
             </a:fld>
             <a:endParaRPr lang="en-GB"/>
           </a:p>
@@ -3260,7 +3260,7 @@
           <a:p>
             <a:fld id="{8B14C7FE-A8AE-41B9-8C34-CC5849DD2839}" type="slidenum">
               <a:rPr lang="en-GB" smtClean="0"/>
-              <a:t>‹Nr.›</a:t>
+              <a:t>‹#›</a:t>
             </a:fld>
             <a:endParaRPr lang="en-GB"/>
           </a:p>
@@ -3996,7 +3996,7 @@
         <p:spPr>
           <a:xfrm>
             <a:off x="3574832" y="5622426"/>
-            <a:ext cx="2916618" cy="3146997"/>
+            <a:ext cx="2916618" cy="3363022"/>
           </a:xfrm>
           <a:prstGeom prst="roundRect">
             <a:avLst>
@@ -4057,8 +4057,8 @@
         </p:nvSpPr>
         <p:spPr>
           <a:xfrm>
-            <a:off x="3219951" y="704528"/>
-            <a:ext cx="3387549" cy="1916926"/>
+            <a:off x="3219951" y="1065068"/>
+            <a:ext cx="3387549" cy="1556385"/>
           </a:xfrm>
           <a:prstGeom prst="roundRect">
             <a:avLst>
@@ -5172,7 +5172,7 @@
         <p:spPr>
           <a:xfrm>
             <a:off x="4058982" y="5601072"/>
-            <a:ext cx="2448274" cy="3323987"/>
+            <a:ext cx="2448274" cy="3477875"/>
           </a:xfrm>
           <a:prstGeom prst="rect">
             <a:avLst/>
@@ -5256,6 +5256,22 @@
               </a:rPr>
               <a:t>()*/</a:t>
             </a:r>
+            <a:r>
+              <a:rPr lang="it-IT" sz="1000" dirty="0" err="1">
+                <a:latin typeface="Courier" pitchFamily="49" charset="0"/>
+                <a:cs typeface="Arial" pitchFamily="34" charset="0"/>
+              </a:rPr>
+              <a:t>plot.netsplit</a:t>
+            </a:r>
+            <a:r>
+              <a:rPr lang="it-IT" sz="1000" dirty="0">
+                <a:latin typeface="Courier" pitchFamily="49" charset="0"/>
+                <a:cs typeface="Arial" pitchFamily="34" charset="0"/>
+              </a:rPr>
+              <a:t>()/</a:t>
+            </a:r>
+          </a:p>
+          <a:p>
             <a:r>
               <a:rPr lang="it-IT" sz="1000" dirty="0" err="1">
                 <a:latin typeface="Courier" pitchFamily="49" charset="0"/>
@@ -5575,7 +5591,7 @@
         <p:spPr>
           <a:xfrm flipH="1">
             <a:off x="3967572" y="5622427"/>
-            <a:ext cx="3598" cy="3146996"/>
+            <a:ext cx="3598" cy="3363021"/>
           </a:xfrm>
           <a:prstGeom prst="line">
             <a:avLst/>
@@ -5609,8 +5625,8 @@
         </p:nvSpPr>
         <p:spPr>
           <a:xfrm>
-            <a:off x="3967572" y="785828"/>
-            <a:ext cx="2559588" cy="1754326"/>
+            <a:off x="3967572" y="1099408"/>
+            <a:ext cx="2559588" cy="1477328"/>
           </a:xfrm>
           <a:prstGeom prst="rect">
             <a:avLst/>
@@ -5658,7 +5674,7 @@
                 <a:latin typeface="Courier" pitchFamily="49" charset="0"/>
                 <a:cs typeface="Arial" pitchFamily="34" charset="0"/>
               </a:rPr>
-              <a:t>dat.baker2009, dat.dogliotti2014</a:t>
+              <a:t>Baker2009, Dogliotti2014</a:t>
             </a:r>
           </a:p>
           <a:p>
@@ -5667,7 +5683,7 @@
                 <a:latin typeface="Courier" pitchFamily="49" charset="0"/>
                 <a:cs typeface="Arial" pitchFamily="34" charset="0"/>
               </a:rPr>
-              <a:t>dat.dong2013, dat.gurusamy2011,</a:t>
+              <a:t>Dong2013, Gurusamy2011,</a:t>
             </a:r>
           </a:p>
           <a:p>
@@ -5676,7 +5692,7 @@
                 <a:latin typeface="Courier" pitchFamily="49" charset="0"/>
                 <a:cs typeface="Arial" pitchFamily="34" charset="0"/>
               </a:rPr>
-              <a:t>dat.linde2015, dat.woods2010,</a:t>
+              <a:t>Linde2015, Woods2010,</a:t>
             </a:r>
           </a:p>
           <a:p>
@@ -5731,7 +5747,7 @@
                 <a:latin typeface="Courier" pitchFamily="49" charset="0"/>
                 <a:cs typeface="Arial" pitchFamily="34" charset="0"/>
               </a:rPr>
-              <a:t>dat.franchini2012, dat.senn2013,</a:t>
+              <a:t>Franchini2012, Senn2013,</a:t>
             </a:r>
           </a:p>
           <a:p>
@@ -5740,7 +5756,7 @@
                 <a:latin typeface="Courier" pitchFamily="49" charset="0"/>
                 <a:cs typeface="Arial" pitchFamily="34" charset="0"/>
               </a:rPr>
-              <a:t>dat.stowe2010</a:t>
+              <a:t>Stowe2010</a:t>
             </a:r>
           </a:p>
           <a:p>
@@ -5771,59 +5787,6 @@
               <a:latin typeface="Courier" pitchFamily="49" charset="0"/>
               <a:cs typeface="Arial" pitchFamily="34" charset="0"/>
             </a:endParaRPr>
-          </a:p>
-          <a:p>
-            <a:r>
-              <a:rPr lang="it-IT" sz="900" u="sng" dirty="0" err="1">
-                <a:latin typeface="Arial" pitchFamily="34" charset="0"/>
-                <a:cs typeface="Arial" pitchFamily="34" charset="0"/>
-              </a:rPr>
-              <a:t>Generic</a:t>
-            </a:r>
-            <a:r>
-              <a:rPr lang="it-IT" sz="900" u="sng" dirty="0">
-                <a:latin typeface="Arial" pitchFamily="34" charset="0"/>
-                <a:cs typeface="Arial" pitchFamily="34" charset="0"/>
-              </a:rPr>
-              <a:t> </a:t>
-            </a:r>
-            <a:r>
-              <a:rPr lang="it-IT" sz="900" u="sng" dirty="0" err="1">
-                <a:latin typeface="Arial" pitchFamily="34" charset="0"/>
-                <a:cs typeface="Arial" pitchFamily="34" charset="0"/>
-              </a:rPr>
-              <a:t>outcome</a:t>
-            </a:r>
-            <a:r>
-              <a:rPr lang="it-IT" sz="900" u="sng" dirty="0">
-                <a:latin typeface="Arial" pitchFamily="34" charset="0"/>
-                <a:cs typeface="Arial" pitchFamily="34" charset="0"/>
-              </a:rPr>
-              <a:t> (</a:t>
-            </a:r>
-            <a:r>
-              <a:rPr lang="it-IT" sz="900" u="sng" dirty="0" err="1">
-                <a:latin typeface="Arial" pitchFamily="34" charset="0"/>
-                <a:cs typeface="Arial" pitchFamily="34" charset="0"/>
-              </a:rPr>
-              <a:t>comparison-based</a:t>
-            </a:r>
-            <a:r>
-              <a:rPr lang="it-IT" sz="900" u="sng" dirty="0">
-                <a:latin typeface="Arial" pitchFamily="34" charset="0"/>
-                <a:cs typeface="Arial" pitchFamily="34" charset="0"/>
-              </a:rPr>
-              <a:t> format):</a:t>
-            </a:r>
-          </a:p>
-          <a:p>
-            <a:r>
-              <a:rPr lang="en-GB" sz="900" dirty="0">
-                <a:latin typeface="Courier" pitchFamily="49" charset="0"/>
-                <a:cs typeface="Arial" pitchFamily="34" charset="0"/>
-              </a:rPr>
-              <a:t>Linde2016, Senn2013</a:t>
-            </a:r>
           </a:p>
         </p:txBody>
       </p:sp>
@@ -5843,8 +5806,8 @@
         </p:nvCxnSpPr>
         <p:spPr>
           <a:xfrm>
-            <a:off x="3790856" y="704528"/>
-            <a:ext cx="0" cy="1916926"/>
+            <a:off x="3790856" y="1065068"/>
+            <a:ext cx="0" cy="1556386"/>
           </a:xfrm>
           <a:prstGeom prst="line">
             <a:avLst/>
@@ -5884,8 +5847,8 @@
         </p:nvSpPr>
         <p:spPr>
           <a:xfrm rot="16200000">
-            <a:off x="2692278" y="1466838"/>
-            <a:ext cx="1660833" cy="392306"/>
+            <a:off x="2838634" y="1624514"/>
+            <a:ext cx="1368151" cy="392276"/>
           </a:xfrm>
           <a:prstGeom prst="rect">
             <a:avLst/>
@@ -5919,6 +5882,16 @@
           <a:p>
             <a:pPr algn="ctr"/>
             <a:r>
+              <a:rPr lang="de-DE" sz="1400" dirty="0">
+                <a:solidFill>
+                  <a:schemeClr val="tx1"/>
+                </a:solidFill>
+                <a:latin typeface="Arial" pitchFamily="34" charset="0"/>
+                <a:cs typeface="Arial" pitchFamily="34" charset="0"/>
+              </a:rPr>
+              <a:t>Datasets </a:t>
+            </a:r>
+            <a:r>
               <a:rPr lang="de-DE" sz="1400" dirty="0" err="1">
                 <a:solidFill>
                   <a:schemeClr val="tx1"/>
@@ -5926,8 +5899,18 @@
                 <a:latin typeface="Arial" pitchFamily="34" charset="0"/>
                 <a:cs typeface="Arial" pitchFamily="34" charset="0"/>
               </a:rPr>
-              <a:t>Available</a:t>
-            </a:r>
+              <a:t>used</a:t>
+            </a:r>
+            <a:endParaRPr lang="de-DE" sz="1400" dirty="0">
+              <a:solidFill>
+                <a:schemeClr val="tx1"/>
+              </a:solidFill>
+              <a:latin typeface="Arial" pitchFamily="34" charset="0"/>
+              <a:cs typeface="Arial" pitchFamily="34" charset="0"/>
+            </a:endParaRPr>
+          </a:p>
+          <a:p>
+            <a:pPr algn="ctr"/>
             <a:r>
               <a:rPr lang="de-DE" sz="1400" dirty="0">
                 <a:solidFill>
@@ -5936,7 +5919,7 @@
                 <a:latin typeface="Arial" pitchFamily="34" charset="0"/>
                 <a:cs typeface="Arial" pitchFamily="34" charset="0"/>
               </a:rPr>
-              <a:t> </a:t>
+              <a:t>in </a:t>
             </a:r>
             <a:r>
               <a:rPr lang="de-DE" sz="1400" dirty="0" err="1">
@@ -5946,47 +5929,7 @@
                 <a:latin typeface="Arial" pitchFamily="34" charset="0"/>
                 <a:cs typeface="Arial" pitchFamily="34" charset="0"/>
               </a:rPr>
-              <a:t>example</a:t>
-            </a:r>
-            <a:r>
-              <a:rPr lang="de-DE" sz="1400" dirty="0">
-                <a:solidFill>
-                  <a:schemeClr val="tx1"/>
-                </a:solidFill>
-                <a:latin typeface="Arial" pitchFamily="34" charset="0"/>
-                <a:cs typeface="Arial" pitchFamily="34" charset="0"/>
-              </a:rPr>
-              <a:t> </a:t>
-            </a:r>
-            <a:r>
-              <a:rPr lang="de-DE" sz="1400" dirty="0" err="1">
-                <a:solidFill>
-                  <a:schemeClr val="tx1"/>
-                </a:solidFill>
-                <a:latin typeface="Arial" pitchFamily="34" charset="0"/>
-                <a:cs typeface="Arial" pitchFamily="34" charset="0"/>
-              </a:rPr>
-              <a:t>data</a:t>
-            </a:r>
-            <a:r>
-              <a:rPr lang="de-DE" sz="1400" dirty="0">
-                <a:solidFill>
-                  <a:schemeClr val="tx1"/>
-                </a:solidFill>
-                <a:latin typeface="Arial" pitchFamily="34" charset="0"/>
-                <a:cs typeface="Arial" pitchFamily="34" charset="0"/>
-              </a:rPr>
-              <a:t> </a:t>
-            </a:r>
-            <a:r>
-              <a:rPr lang="de-DE" sz="1400" dirty="0" err="1">
-                <a:solidFill>
-                  <a:schemeClr val="tx1"/>
-                </a:solidFill>
-                <a:latin typeface="Arial" pitchFamily="34" charset="0"/>
-                <a:cs typeface="Arial" pitchFamily="34" charset="0"/>
-              </a:rPr>
-              <a:t>sets</a:t>
+              <a:t>examples</a:t>
             </a:r>
             <a:endParaRPr lang="de-DE" sz="1400" b="1" dirty="0">
               <a:solidFill>
